--- a/medical_accident_its_analysis/manuscript/hp_figures.pptx
+++ b/medical_accident_its_analysis/manuscript/hp_figures.pptx
@@ -331,7 +331,7 @@
           <a:p>
             <a:fld id="{C1FF6DA9-008F-8B48-92A6-B652298478BF}" type="slidenum">
               <a:rPr lang="en-US" smtClean="0"/>
-              <a:t>‹#›</a:t>
+              <a:t>#</a:t>
             </a:fld>
             <a:endParaRPr lang="en-US"/>
           </a:p>
@@ -501,7 +501,7 @@
           <a:p>
             <a:fld id="{C1FF6DA9-008F-8B48-92A6-B652298478BF}" type="slidenum">
               <a:rPr lang="en-US" smtClean="0"/>
-              <a:t>‹#›</a:t>
+              <a:t>#</a:t>
             </a:fld>
             <a:endParaRPr lang="en-US"/>
           </a:p>
@@ -681,7 +681,7 @@
           <a:p>
             <a:fld id="{C1FF6DA9-008F-8B48-92A6-B652298478BF}" type="slidenum">
               <a:rPr lang="en-US" smtClean="0"/>
-              <a:t>‹#›</a:t>
+              <a:t>#</a:t>
             </a:fld>
             <a:endParaRPr lang="en-US"/>
           </a:p>
@@ -851,7 +851,7 @@
           <a:p>
             <a:fld id="{C1FF6DA9-008F-8B48-92A6-B652298478BF}" type="slidenum">
               <a:rPr lang="en-US" smtClean="0"/>
-              <a:t>‹#›</a:t>
+              <a:t>#</a:t>
             </a:fld>
             <a:endParaRPr lang="en-US"/>
           </a:p>
@@ -1097,7 +1097,7 @@
           <a:p>
             <a:fld id="{C1FF6DA9-008F-8B48-92A6-B652298478BF}" type="slidenum">
               <a:rPr lang="en-US" smtClean="0"/>
-              <a:t>‹#›</a:t>
+              <a:t>#</a:t>
             </a:fld>
             <a:endParaRPr lang="en-US"/>
           </a:p>
@@ -1385,7 +1385,7 @@
           <a:p>
             <a:fld id="{C1FF6DA9-008F-8B48-92A6-B652298478BF}" type="slidenum">
               <a:rPr lang="en-US" smtClean="0"/>
-              <a:t>‹#›</a:t>
+              <a:t>#</a:t>
             </a:fld>
             <a:endParaRPr lang="en-US"/>
           </a:p>
@@ -1807,7 +1807,7 @@
           <a:p>
             <a:fld id="{C1FF6DA9-008F-8B48-92A6-B652298478BF}" type="slidenum">
               <a:rPr lang="en-US" smtClean="0"/>
-              <a:t>‹#›</a:t>
+              <a:t>#</a:t>
             </a:fld>
             <a:endParaRPr lang="en-US"/>
           </a:p>
@@ -1925,7 +1925,7 @@
           <a:p>
             <a:fld id="{C1FF6DA9-008F-8B48-92A6-B652298478BF}" type="slidenum">
               <a:rPr lang="en-US" smtClean="0"/>
-              <a:t>‹#›</a:t>
+              <a:t>#</a:t>
             </a:fld>
             <a:endParaRPr lang="en-US"/>
           </a:p>
@@ -2020,7 +2020,7 @@
           <a:p>
             <a:fld id="{C1FF6DA9-008F-8B48-92A6-B652298478BF}" type="slidenum">
               <a:rPr lang="en-US" smtClean="0"/>
-              <a:t>‹#›</a:t>
+              <a:t>#</a:t>
             </a:fld>
             <a:endParaRPr lang="en-US"/>
           </a:p>
@@ -2297,7 +2297,7 @@
           <a:p>
             <a:fld id="{C1FF6DA9-008F-8B48-92A6-B652298478BF}" type="slidenum">
               <a:rPr lang="en-US" smtClean="0"/>
-              <a:t>‹#›</a:t>
+              <a:t>#</a:t>
             </a:fld>
             <a:endParaRPr lang="en-US"/>
           </a:p>
@@ -2550,7 +2550,7 @@
           <a:p>
             <a:fld id="{C1FF6DA9-008F-8B48-92A6-B652298478BF}" type="slidenum">
               <a:rPr lang="en-US" smtClean="0"/>
-              <a:t>‹#›</a:t>
+              <a:t>#</a:t>
             </a:fld>
             <a:endParaRPr lang="en-US"/>
           </a:p>
@@ -2799,7 +2799,7 @@
           <a:p>
             <a:fld id="{C1FF6DA9-008F-8B48-92A6-B652298478BF}" type="slidenum">
               <a:rPr lang="en-US" smtClean="0"/>
-              <a:t>‹#›</a:t>
+              <a:t>#</a:t>
             </a:fld>
             <a:endParaRPr lang="en-US"/>
           </a:p>
@@ -2849,7 +2849,7 @@
           <a:spcPct val="20000"/>
         </a:spcBef>
         <a:buFont typeface="Arial"/>
-        <a:buChar char="•"/>
+        <a:buChar char="*"/>
         <a:defRPr sz="3200" kern="1200">
           <a:solidFill>
             <a:schemeClr val="tx1"/>
@@ -2864,7 +2864,7 @@
           <a:spcPct val="20000"/>
         </a:spcBef>
         <a:buFont typeface="Arial"/>
-        <a:buChar char="–"/>
+        <a:buChar char="-"/>
         <a:defRPr sz="2800" kern="1200">
           <a:solidFill>
             <a:schemeClr val="tx1"/>
@@ -2879,7 +2879,7 @@
           <a:spcPct val="20000"/>
         </a:spcBef>
         <a:buFont typeface="Arial"/>
-        <a:buChar char="•"/>
+        <a:buChar char="*"/>
         <a:defRPr sz="2400" kern="1200">
           <a:solidFill>
             <a:schemeClr val="tx1"/>
@@ -2894,7 +2894,7 @@
           <a:spcPct val="20000"/>
         </a:spcBef>
         <a:buFont typeface="Arial"/>
-        <a:buChar char="–"/>
+        <a:buChar char="-"/>
         <a:defRPr sz="2000" kern="1200">
           <a:solidFill>
             <a:schemeClr val="tx1"/>
@@ -2909,7 +2909,7 @@
           <a:spcPct val="20000"/>
         </a:spcBef>
         <a:buFont typeface="Arial"/>
-        <a:buChar char="»"/>
+        <a:buChar char="&gt;&gt;"/>
         <a:defRPr sz="2000" kern="1200">
           <a:solidFill>
             <a:schemeClr val="tx1"/>
@@ -2924,7 +2924,7 @@
           <a:spcPct val="20000"/>
         </a:spcBef>
         <a:buFont typeface="Arial"/>
-        <a:buChar char="•"/>
+        <a:buChar char="*"/>
         <a:defRPr sz="2000" kern="1200">
           <a:solidFill>
             <a:schemeClr val="tx1"/>
@@ -2939,7 +2939,7 @@
           <a:spcPct val="20000"/>
         </a:spcBef>
         <a:buFont typeface="Arial"/>
-        <a:buChar char="•"/>
+        <a:buChar char="*"/>
         <a:defRPr sz="2000" kern="1200">
           <a:solidFill>
             <a:schemeClr val="tx1"/>
@@ -2954,7 +2954,7 @@
           <a:spcPct val="20000"/>
         </a:spcBef>
         <a:buFont typeface="Arial"/>
-        <a:buChar char="•"/>
+        <a:buChar char="*"/>
         <a:defRPr sz="2000" kern="1200">
           <a:solidFill>
             <a:schemeClr val="tx1"/>
@@ -2969,7 +2969,7 @@
           <a:spcPct val="20000"/>
         </a:spcBef>
         <a:buFont typeface="Arial"/>
-        <a:buChar char="•"/>
+        <a:buChar char="*"/>
         <a:defRPr sz="2000" kern="1200">
           <a:solidFill>
             <a:schemeClr val="tx1"/>
@@ -3325,10 +3325,10 @@
         <a:latin typeface="Calibri"/>
         <a:ea typeface=""/>
         <a:cs typeface=""/>
-        <a:font script="Jpan" typeface="ＭＳ Ｐゴシック"/>
-        <a:font script="Hang" typeface="맑은 고딕"/>
-        <a:font script="Hans" typeface="宋体"/>
-        <a:font script="Hant" typeface="新細明體"/>
+        <a:font script="Jpan" typeface="MS PGothic"/>
+        <a:font script="Hang" typeface="Malgun Gothic"/>
+        <a:font script="Hans" typeface="SimSun"/>
+        <a:font script="Hant" typeface="PMingLiU"/>
         <a:font script="Arab" typeface="Times New Roman"/>
         <a:font script="Hebr" typeface="Times New Roman"/>
         <a:font script="Thai" typeface="Angsana New"/>
@@ -3360,10 +3360,10 @@
         <a:latin typeface="Calibri"/>
         <a:ea typeface=""/>
         <a:cs typeface=""/>
-        <a:font script="Jpan" typeface="ＭＳ Ｐゴシック"/>
-        <a:font script="Hang" typeface="맑은 고딕"/>
-        <a:font script="Hans" typeface="宋体"/>
-        <a:font script="Hant" typeface="新細明體"/>
+        <a:font script="Jpan" typeface="MS PGothic"/>
+        <a:font script="Hang" typeface="Malgun Gothic"/>
+        <a:font script="Hans" typeface="SimSun"/>
+        <a:font script="Hant" typeface="PMingLiU"/>
         <a:font script="Arab" typeface="Arial"/>
         <a:font script="Hebr" typeface="Arial"/>
         <a:font script="Thai" typeface="Cordia New"/>
